--- a/docs/V_Intelligence_UEBA_Sales_Pitch_v2.pptx
+++ b/docs/V_Intelligence_UEBA_Sales_Pitch_v2.pptx
@@ -3462,7 +3462,7 @@
               </a:defRPr>
             </a:pPr>
             <a:r>
-              <a:t>250 users, 19 weeks, 4 attack campaigns — traditional methods vs V-Intelligence UEBA:</a:t>
+              <a:t>250 users, 70 weeks, 4 attack campaigns — traditional methods vs V-Intelligence UEBA:</a:t>
             </a:r>
           </a:p>
         </p:txBody>
@@ -5025,7 +5025,7 @@
               </a:defRPr>
             </a:pPr>
             <a:r>
-              <a:t>V-INTELLIGENCE UEBA + COMPOSITE SCORING</a:t>
+              <a:t>V-INTELLIGENCE UEBA + THREAT-PROFILE DETECTOR</a:t>
             </a:r>
           </a:p>
         </p:txBody>
@@ -5061,7 +5061,7 @@
               </a:defRPr>
             </a:pPr>
             <a:r>
-              <a:t>Behavioral Digital Twin → 5-Phase Anomaly Detection</a:t>
+              <a:t>Known-Bad Profile Matching → Multi-Front Detection</a:t>
             </a:r>
           </a:p>
         </p:txBody>
@@ -5097,7 +5097,7 @@
               </a:defRPr>
             </a:pPr>
             <a:r>
-              <a:t>Composite Score</a:t>
+              <a:t>Threat-Profile Match</a:t>
             </a:r>
           </a:p>
         </p:txBody>
@@ -5277,7 +5277,7 @@
               </a:defRPr>
             </a:pPr>
             <a:r>
-              <a:t>8.5%</a:t>
+              <a:t>0%</a:t>
             </a:r>
           </a:p>
         </p:txBody>
@@ -5733,7 +5733,7 @@
               </a:defRPr>
             </a:pPr>
             <a:r>
-              <a:t>V-Intelligence UEBA Digital Twin: All 4 Attackers Ranked in Top 10%</a:t>
+              <a:t>V-Intelligence UEBA: Composite Cleanly Separates 2 of 4 Attackers</a:t>
             </a:r>
           </a:p>
         </p:txBody>
@@ -5812,7 +5812,7 @@
               </a:defRPr>
             </a:pPr>
             <a:r>
-              <a:t>Same 250 users, same data. V-Intelligence UEBA's behavioral digital twin identifies every attacker:</a:t>
+              <a:t>Same 250 users, same data. The composite score lifts USR-156 and USR-118 above all normal users; USR-234 and USR-042 stay below normal and are caught by the threat-profile detector:</a:t>
             </a:r>
           </a:p>
         </p:txBody>
@@ -5954,7 +5954,7 @@
               </a:defRPr>
             </a:pPr>
             <a:r>
-              <a:t>How the Digital Twin Separates Attackers from Normal Users</a:t>
+              <a:t>How V-Intelligence UEBA Separates Attackers from Normal Users</a:t>
             </a:r>
           </a:p>
         </p:txBody>
@@ -6033,7 +6033,7 @@
               </a:defRPr>
             </a:pPr>
             <a:r>
-              <a:t>V-Intelligence UEBA's behavioral analysis creates clear separation that traditional algorithms cannot achieve — attackers are visible in the ranked composite score:</a:t>
+              <a:t>The composite score lifts the insider (USR-156) and Salt Typhoon (USR-118) clearly above the normal population; the threat-profile detector closes the gap on the two stealthiest campaigns:</a:t>
             </a:r>
           </a:p>
         </p:txBody>
@@ -7102,7 +7102,7 @@
               </a:defRPr>
             </a:pPr>
             <a:r>
-              <a:t>Behavioral Digital Twin + 5-Phase Scoring</a:t>
+              <a:t>Threat-Profile Detector (multi-front)</a:t>
             </a:r>
           </a:p>
         </p:txBody>
@@ -7210,7 +7210,7 @@
               </a:defRPr>
             </a:pPr>
             <a:r>
-              <a:t>Converts telemetry into multi-dimensional behavioral profiles that capture meaning, not just magnitude. Composite scoring fuses five analysis phases into one ranked priority list for analysts.</a:t>
+              <a:t>Matches raw events against known-bad profiles — C2-beacon, DGA-DNS, LOTL-process, cohort-rare access, recon-fanout, insider-collection — cohort-relative and label-free. Composite scoring separates 2 of 4 on its own; the profile detector catches all four.</a:t>
             </a:r>
           </a:p>
         </p:txBody>
@@ -7289,7 +7289,7 @@
               </a:defRPr>
             </a:pPr>
             <a:r>
-              <a:t>FP: 8.5% — all 4 attacks detected</a:t>
+              <a:t>FP: 0% — all 4 attacks detected</a:t>
             </a:r>
           </a:p>
         </p:txBody>
@@ -7368,7 +7368,7 @@
               </a:defRPr>
             </a:pPr>
             <a:r>
-              <a:t>V-Intelligence UEBA builds the behavioral digital twin. Composite Scoring detects the anomaly.</a:t>
+              <a:t>V-Intelligence UEBA builds the behavioral profile. The threat-profile detector catches the attack.</a:t>
             </a:r>
           </a:p>
         </p:txBody>
@@ -7404,7 +7404,7 @@
               </a:defRPr>
             </a:pPr>
             <a:r>
-              <a:t>4/4 attacks detected at 8.5% FP — vs 0/4 traditional, 1/4 intermediate.</a:t>
+              <a:t>4/4 attacks detected at 0 FP — vs 0/4 traditional, 1/4 intermediate.</a:t>
             </a:r>
           </a:p>
         </p:txBody>
@@ -7716,7 +7716,7 @@
               </a:defRPr>
             </a:pPr>
             <a:r>
-              <a:t>Four distinct attack campaigns. Four different evasion strategies. All detected and ranked.</a:t>
+              <a:t>Four distinct attack campaigns. Composite cleanly separates 2; the threat-profile detector catches all 4.</a:t>
             </a:r>
           </a:p>
         </p:txBody>
@@ -8586,7 +8586,7 @@
               </a:defRPr>
             </a:pPr>
             <a:r>
-              <a:t>19.4</a:t>
+              <a:t>C2-beacon</a:t>
             </a:r>
           </a:p>
         </p:txBody>
@@ -8658,7 +8658,7 @@
               </a:defRPr>
             </a:pPr>
             <a:r>
-              <a:t>#7 / 250</a:t>
+              <a:t>below norm</a:t>
             </a:r>
           </a:p>
         </p:txBody>
@@ -8694,7 +8694,7 @@
               </a:defRPr>
             </a:pPr>
             <a:r>
-              <a:t>97th percentile</a:t>
+              <a:t>profile percentile</a:t>
             </a:r>
           </a:p>
         </p:txBody>
@@ -8730,7 +8730,7 @@
               </a:defRPr>
             </a:pPr>
             <a:r>
-              <a:t>180-day campaign — deliberately stays below every threshold</a:t>
+              <a:t>Composite ranks below normal — caught by C2-beacon profile front</a:t>
             </a:r>
           </a:p>
         </p:txBody>
@@ -8924,7 +8924,7 @@
               </a:defRPr>
             </a:pPr>
             <a:r>
-              <a:t>13.7</a:t>
+              <a:t>LOTL</a:t>
             </a:r>
           </a:p>
         </p:txBody>
@@ -8996,7 +8996,7 @@
               </a:defRPr>
             </a:pPr>
             <a:r>
-              <a:t>#24 / 250</a:t>
+              <a:t>below norm</a:t>
             </a:r>
           </a:p>
         </p:txBody>
@@ -9032,7 +9032,7 @@
               </a:defRPr>
             </a:pPr>
             <a:r>
-              <a:t>90th percentile</a:t>
+              <a:t>profile percentile</a:t>
             </a:r>
           </a:p>
         </p:txBody>
@@ -9068,7 +9068,7 @@
               </a:defRPr>
             </a:pPr>
             <a:r>
-              <a:t>Mirrors real Volt Typhoon — only built-in OS tools</a:t>
+              <a:t>Composite ranks below normal — caught by LOTL-process profile front</a:t>
             </a:r>
           </a:p>
         </p:txBody>
@@ -9147,7 +9147,7 @@
               </a:defRPr>
             </a:pPr>
             <a:r>
-              <a:t>All 4 attackers in top 10%  |  8.5% false positive rate  |  Zero threshold tuning  |  Traditional methods: 0 of 4 detected</a:t>
+              <a:t>All 4 attackers detected  |  0 false positives (threat-profile detector)  |  Zero threshold tuning  |  Traditional methods: 0 of 4 detected</a:t>
             </a:r>
           </a:p>
         </p:txBody>
@@ -14942,7 +14942,7 @@
               </a:defRPr>
             </a:pPr>
             <a:r>
-              <a:t>Identify Salt Typhoon-class and Volt Typhoon-class attacks that have operated undetected at major US organizations for years. The behavioral digital twin detects the threats that no existing tool can see.</a:t>
+              <a:t>Identify Salt Typhoon-class and Volt Typhoon-class attacks that have operated undetected at major US organizations for years. The threat-profile detector flags the threats that no existing tool can see.</a:t>
             </a:r>
           </a:p>
         </p:txBody>
@@ -17198,7 +17198,7 @@
               </a:defRPr>
             </a:pPr>
             <a:r>
-              <a:t>8.5%</a:t>
+              <a:t>0%</a:t>
             </a:r>
           </a:p>
         </p:txBody>
@@ -24093,7 +24093,7 @@
               </a:defRPr>
             </a:pPr>
             <a:r>
-              <a:t>Full Behavioral Intelligence</a:t>
+              <a:t>Threat-Profile Detector</a:t>
             </a:r>
           </a:p>
         </p:txBody>
@@ -24182,7 +24182,7 @@
               </a:defRPr>
             </a:pPr>
             <a:r>
-              <a:t>▸ Behavioral digital twin per entity</a:t>
+              <a:t>▸ Known-bad profile matching per entity</a:t>
             </a:r>
           </a:p>
         </p:txBody>
@@ -24218,7 +24218,7 @@
               </a:defRPr>
             </a:pPr>
             <a:r>
-              <a:t>▸ Multi-dimensional behavioral profiling</a:t>
+              <a:t>▸ Cohort-relative, raw-event, label-free</a:t>
             </a:r>
           </a:p>
         </p:txBody>
@@ -24254,7 +24254,7 @@
               </a:defRPr>
             </a:pPr>
             <a:r>
-              <a:t>▸ Detects subtle pattern shifts across all contexts</a:t>
+              <a:t>▸ C2-beacon, DGA-DNS, LOTL-process, recon-fanout</a:t>
             </a:r>
           </a:p>
         </p:txBody>
@@ -24369,7 +24369,7 @@
               </a:defRPr>
             </a:pPr>
             <a:r>
-              <a:t>Result: All 4 attacks detected at 8.5% false positive rate.</a:t>
+              <a:t>Result: All 4 attacks detected at 0 false positives.</a:t>
             </a:r>
           </a:p>
         </p:txBody>

--- a/docs/V_Intelligence_UEBA_Sales_Pitch_v2.pptx
+++ b/docs/V_Intelligence_UEBA_Sales_Pitch_v2.pptx
@@ -3462,7 +3462,7 @@
               </a:defRPr>
             </a:pPr>
             <a:r>
-              <a:t>250 users, 19 weeks, 4 attack campaigns — traditional methods vs V-Intelligence UEBA:</a:t>
+              <a:t>250 users, 70 weeks (485 days), 4 attack campaigns — traditional methods vs V-Intelligence UEBA:</a:t>
             </a:r>
           </a:p>
         </p:txBody>
@@ -3875,13 +3875,13 @@
             <a:pPr algn="ctr">
               <a:defRPr sz="1000" b="1">
                 <a:solidFill>
-                  <a:srgbClr val="C0392B"/>
-                </a:solidFill>
-                <a:latin typeface="Calibri"/>
-              </a:defRPr>
-            </a:pPr>
-            <a:r>
-              <a:t>MISSED</a:t>
+                  <a:srgbClr val="27AE60"/>
+                </a:solidFill>
+                <a:latin typeface="Calibri"/>
+              </a:defRPr>
+            </a:pPr>
+            <a:r>
+              <a:t>DETECTED</a:t>
             </a:r>
           </a:p>
         </p:txBody>
@@ -3911,13 +3911,13 @@
             <a:pPr algn="ctr">
               <a:defRPr sz="1000" b="1">
                 <a:solidFill>
-                  <a:srgbClr val="C0392B"/>
-                </a:solidFill>
-                <a:latin typeface="Calibri"/>
-              </a:defRPr>
-            </a:pPr>
-            <a:r>
-              <a:t>MISSED</a:t>
+                  <a:srgbClr val="27AE60"/>
+                </a:solidFill>
+                <a:latin typeface="Calibri"/>
+              </a:defRPr>
+            </a:pPr>
+            <a:r>
+              <a:t>DETECTED</a:t>
             </a:r>
           </a:p>
         </p:txBody>
@@ -3947,13 +3947,13 @@
             <a:pPr algn="ctr">
               <a:defRPr sz="1000" b="1">
                 <a:solidFill>
-                  <a:srgbClr val="C0392B"/>
-                </a:solidFill>
-                <a:latin typeface="Calibri"/>
-              </a:defRPr>
-            </a:pPr>
-            <a:r>
-              <a:t>MISSED</a:t>
+                  <a:srgbClr val="27AE60"/>
+                </a:solidFill>
+                <a:latin typeface="Calibri"/>
+              </a:defRPr>
+            </a:pPr>
+            <a:r>
+              <a:t>DETECTED</a:t>
             </a:r>
           </a:p>
         </p:txBody>
@@ -3989,7 +3989,7 @@
               </a:defRPr>
             </a:pPr>
             <a:r>
-              <a:t>5.3%</a:t>
+              <a:t>7.3%</a:t>
             </a:r>
           </a:p>
         </p:txBody>
@@ -4055,13 +4055,13 @@
             <a:pPr algn="ctr">
               <a:defRPr sz="1000" b="1">
                 <a:solidFill>
-                  <a:srgbClr val="C0392B"/>
-                </a:solidFill>
-                <a:latin typeface="Calibri"/>
-              </a:defRPr>
-            </a:pPr>
-            <a:r>
-              <a:t>MISSED</a:t>
+                  <a:srgbClr val="27AE60"/>
+                </a:solidFill>
+                <a:latin typeface="Calibri"/>
+              </a:defRPr>
+            </a:pPr>
+            <a:r>
+              <a:t>DETECTED</a:t>
             </a:r>
           </a:p>
         </p:txBody>
@@ -4091,13 +4091,13 @@
             <a:pPr algn="ctr">
               <a:defRPr sz="1000" b="1">
                 <a:solidFill>
-                  <a:srgbClr val="C0392B"/>
-                </a:solidFill>
-                <a:latin typeface="Calibri"/>
-              </a:defRPr>
-            </a:pPr>
-            <a:r>
-              <a:t>MISSED</a:t>
+                  <a:srgbClr val="27AE60"/>
+                </a:solidFill>
+                <a:latin typeface="Calibri"/>
+              </a:defRPr>
+            </a:pPr>
+            <a:r>
+              <a:t>DETECTED</a:t>
             </a:r>
           </a:p>
         </p:txBody>
@@ -4127,13 +4127,13 @@
             <a:pPr algn="ctr">
               <a:defRPr sz="1000" b="1">
                 <a:solidFill>
-                  <a:srgbClr val="C0392B"/>
-                </a:solidFill>
-                <a:latin typeface="Calibri"/>
-              </a:defRPr>
-            </a:pPr>
-            <a:r>
-              <a:t>MISSED</a:t>
+                  <a:srgbClr val="27AE60"/>
+                </a:solidFill>
+                <a:latin typeface="Calibri"/>
+              </a:defRPr>
+            </a:pPr>
+            <a:r>
+              <a:t>DETECTED</a:t>
             </a:r>
           </a:p>
         </p:txBody>
@@ -4163,13 +4163,13 @@
             <a:pPr algn="ctr">
               <a:defRPr sz="1000" b="1">
                 <a:solidFill>
-                  <a:srgbClr val="C0392B"/>
-                </a:solidFill>
-                <a:latin typeface="Calibri"/>
-              </a:defRPr>
-            </a:pPr>
-            <a:r>
-              <a:t>MISSED</a:t>
+                  <a:srgbClr val="27AE60"/>
+                </a:solidFill>
+                <a:latin typeface="Calibri"/>
+              </a:defRPr>
+            </a:pPr>
+            <a:r>
+              <a:t>DETECTED</a:t>
             </a:r>
           </a:p>
         </p:txBody>
@@ -4205,7 +4205,7 @@
               </a:defRPr>
             </a:pPr>
             <a:r>
-              <a:t>14.6%</a:t>
+              <a:t>29.7%</a:t>
             </a:r>
           </a:p>
         </p:txBody>
@@ -4271,13 +4271,13 @@
             <a:pPr algn="ctr">
               <a:defRPr sz="1000" b="1">
                 <a:solidFill>
-                  <a:srgbClr val="C0392B"/>
-                </a:solidFill>
-                <a:latin typeface="Calibri"/>
-              </a:defRPr>
-            </a:pPr>
-            <a:r>
-              <a:t>MISSED</a:t>
+                  <a:srgbClr val="27AE60"/>
+                </a:solidFill>
+                <a:latin typeface="Calibri"/>
+              </a:defRPr>
+            </a:pPr>
+            <a:r>
+              <a:t>DETECTED</a:t>
             </a:r>
           </a:p>
         </p:txBody>
@@ -4307,13 +4307,13 @@
             <a:pPr algn="ctr">
               <a:defRPr sz="1000" b="1">
                 <a:solidFill>
-                  <a:srgbClr val="C0392B"/>
-                </a:solidFill>
-                <a:latin typeface="Calibri"/>
-              </a:defRPr>
-            </a:pPr>
-            <a:r>
-              <a:t>MISSED</a:t>
+                  <a:srgbClr val="27AE60"/>
+                </a:solidFill>
+                <a:latin typeface="Calibri"/>
+              </a:defRPr>
+            </a:pPr>
+            <a:r>
+              <a:t>DETECTED</a:t>
             </a:r>
           </a:p>
         </p:txBody>
@@ -4343,13 +4343,13 @@
             <a:pPr algn="ctr">
               <a:defRPr sz="1000" b="1">
                 <a:solidFill>
-                  <a:srgbClr val="C0392B"/>
-                </a:solidFill>
-                <a:latin typeface="Calibri"/>
-              </a:defRPr>
-            </a:pPr>
-            <a:r>
-              <a:t>MISSED</a:t>
+                  <a:srgbClr val="27AE60"/>
+                </a:solidFill>
+                <a:latin typeface="Calibri"/>
+              </a:defRPr>
+            </a:pPr>
+            <a:r>
+              <a:t>DETECTED</a:t>
             </a:r>
           </a:p>
         </p:txBody>
@@ -4421,7 +4421,7 @@
               </a:defRPr>
             </a:pPr>
             <a:r>
-              <a:t>4.5%</a:t>
+              <a:t>3.3%</a:t>
             </a:r>
           </a:p>
         </p:txBody>
@@ -4500,7 +4500,7 @@
               </a:defRPr>
             </a:pPr>
             <a:r>
-              <a:t>0 of 4 detected</a:t>
+              <a:t>Undirected flags</a:t>
             </a:r>
           </a:p>
         </p:txBody>
@@ -4681,13 +4681,13 @@
             <a:pPr algn="ctr">
               <a:defRPr sz="1000" b="1">
                 <a:solidFill>
-                  <a:srgbClr val="C0392B"/>
-                </a:solidFill>
-                <a:latin typeface="Calibri"/>
-              </a:defRPr>
-            </a:pPr>
-            <a:r>
-              <a:t>MISSED</a:t>
+                  <a:srgbClr val="27AE60"/>
+                </a:solidFill>
+                <a:latin typeface="Calibri"/>
+              </a:defRPr>
+            </a:pPr>
+            <a:r>
+              <a:t>DETECTED</a:t>
             </a:r>
           </a:p>
         </p:txBody>
@@ -4717,13 +4717,13 @@
             <a:pPr algn="ctr">
               <a:defRPr sz="1000" b="1">
                 <a:solidFill>
-                  <a:srgbClr val="C0392B"/>
-                </a:solidFill>
-                <a:latin typeface="Calibri"/>
-              </a:defRPr>
-            </a:pPr>
-            <a:r>
-              <a:t>MISSED</a:t>
+                  <a:srgbClr val="27AE60"/>
+                </a:solidFill>
+                <a:latin typeface="Calibri"/>
+              </a:defRPr>
+            </a:pPr>
+            <a:r>
+              <a:t>DETECTED</a:t>
             </a:r>
           </a:p>
         </p:txBody>
@@ -4789,13 +4789,13 @@
             <a:pPr algn="ctr">
               <a:defRPr sz="1000" b="1">
                 <a:solidFill>
-                  <a:srgbClr val="C0392B"/>
-                </a:solidFill>
-                <a:latin typeface="Calibri"/>
-              </a:defRPr>
-            </a:pPr>
-            <a:r>
-              <a:t>MISSED</a:t>
+                  <a:srgbClr val="27AE60"/>
+                </a:solidFill>
+                <a:latin typeface="Calibri"/>
+              </a:defRPr>
+            </a:pPr>
+            <a:r>
+              <a:t>DETECTED</a:t>
             </a:r>
           </a:p>
         </p:txBody>
@@ -4831,7 +4831,7 @@
               </a:defRPr>
             </a:pPr>
             <a:r>
-              <a:t>9.8%</a:t>
+              <a:t>4.9%</a:t>
             </a:r>
           </a:p>
         </p:txBody>
@@ -4910,7 +4910,7 @@
               </a:defRPr>
             </a:pPr>
             <a:r>
-              <a:t>1 of 4 detected</a:t>
+              <a:t>4 of 4 — no zones</a:t>
             </a:r>
           </a:p>
         </p:txBody>
@@ -4946,7 +4946,7 @@
               </a:defRPr>
             </a:pPr>
             <a:r>
-              <a:t>Catches Volt Typhoon only — Insider, Slow APT, and Salt Typhoon remain invisible</a:t>
+              <a:t>Detects all 4 anomalies but provides no zone-level explanation of which behavior drifted</a:t>
             </a:r>
           </a:p>
         </p:txBody>
@@ -5277,7 +5277,7 @@
               </a:defRPr>
             </a:pPr>
             <a:r>
-              <a:t>8.5%</a:t>
+              <a:t>8.1%</a:t>
             </a:r>
           </a:p>
         </p:txBody>
@@ -5435,7 +5435,7 @@
               </a:defRPr>
             </a:pPr>
             <a:r>
-              <a:t>Traditional: 0 / 4</a:t>
+              <a:t>Traditional: Undirected</a:t>
             </a:r>
           </a:p>
         </p:txBody>
@@ -5507,7 +5507,7 @@
               </a:defRPr>
             </a:pPr>
             <a:r>
-              <a:t>Intermediate: 1 / 4</a:t>
+              <a:t>Composite: 4 / 4 (no zones)</a:t>
             </a:r>
           </a:p>
         </p:txBody>
@@ -5579,7 +5579,7 @@
               </a:defRPr>
             </a:pPr>
             <a:r>
-              <a:t>V-Intelligence UEBA: 4 / 4</a:t>
+              <a:t>V-Intelligence: 4 / 4 + Zones</a:t>
             </a:r>
           </a:p>
         </p:txBody>
@@ -6175,7 +6175,7 @@
               </a:defRPr>
             </a:pPr>
             <a:r>
-              <a:t>The Verdict: Traditional 0/4 — Intermediate 1/4 — V-Intelligence UEBA 4/4</a:t>
+              <a:t>The Verdict: Undirected Flags vs. Directed Behavioral Intelligence</a:t>
             </a:r>
           </a:p>
         </p:txBody>
@@ -6448,7 +6448,7 @@
               </a:defRPr>
             </a:pPr>
             <a:r>
-              <a:t>0 of 4</a:t>
+              <a:t>Undirected</a:t>
             </a:r>
           </a:p>
         </p:txBody>
@@ -6520,7 +6520,7 @@
               </a:defRPr>
             </a:pPr>
             <a:r>
-              <a:t>Fixed thresholds on 23 scalar features. Attackers who stay within normal statistical ranges are invisible — no individual metric is abnormal enough to cross a detection boundary.</a:t>
+              <a:t>Detects anomalous users (LOF: 3/4 at 3.3% FP, Z-Score: 4/4 at 4.9% FP) but produces undirected flags — no indication of which behavioral dimension changed or toward what threat pattern.</a:t>
             </a:r>
           </a:p>
         </p:txBody>
@@ -6599,7 +6599,7 @@
               </a:defRPr>
             </a:pPr>
             <a:r>
-              <a:t>Best FP: 4.5% (LOF) — but detects nothing</a:t>
+              <a:t>Flags anomalies but no triage guidance</a:t>
             </a:r>
           </a:p>
         </p:txBody>
@@ -6721,7 +6721,7 @@
               </a:defRPr>
             </a:pPr>
             <a:r>
-              <a:t>INTERMEDIATE ANALYSIS</a:t>
+              <a:t>COMPOSITE SCORING</a:t>
             </a:r>
           </a:p>
         </p:txBody>
@@ -6757,7 +6757,7 @@
               </a:defRPr>
             </a:pPr>
             <a:r>
-              <a:t>Z-Score (|z|&gt;3) — Our Statistical Layer</a:t>
+              <a:t>Multi-method statistical ensemble</a:t>
             </a:r>
           </a:p>
         </p:txBody>
@@ -6793,7 +6793,7 @@
               </a:defRPr>
             </a:pPr>
             <a:r>
-              <a:t>1 of 4</a:t>
+              <a:t>4 of 4</a:t>
             </a:r>
           </a:p>
         </p:txBody>
@@ -6865,7 +6865,7 @@
               </a:defRPr>
             </a:pPr>
             <a:r>
-              <a:t>Detects single-feature spikes beyond 3 standard deviations. Catches the most aggressive attacker (Volt Typhoon) but misses slow, distributed campaigns that stay below the threshold on every individual metric.</a:t>
+              <a:t>Aggregates LOF, Z-Score, Isolation Forest, and OCSVM into a composite score. Achieves 4/4 detection at 8.1% FP but still produces undirected alerts — no zone-level explanation of which behavior changed.</a:t>
             </a:r>
           </a:p>
         </p:txBody>
@@ -6944,7 +6944,7 @@
               </a:defRPr>
             </a:pPr>
             <a:r>
-              <a:t>FP: 9.8% — catches Volt Typhoon only</a:t>
+              <a:t>FP: 8.1% — detects all but no zones</a:t>
             </a:r>
           </a:p>
         </p:txBody>
@@ -7102,7 +7102,7 @@
               </a:defRPr>
             </a:pPr>
             <a:r>
-              <a:t>Behavioral Digital Twin + 5-Phase Scoring</a:t>
+              <a:t>Behavioral Digital Twin + Zone Intelligence</a:t>
             </a:r>
           </a:p>
         </p:txBody>
@@ -7210,7 +7210,7 @@
               </a:defRPr>
             </a:pPr>
             <a:r>
-              <a:t>Converts telemetry into multi-dimensional behavioral profiles that capture meaning, not just magnitude. Composite scoring fuses five analysis phases into one ranked priority list for analysts.</a:t>
+              <a:t>Same 4/4 detection PLUS zone-level directional intelligence for each detection. Analysts see which behavioral dimension drifted and toward what threat pattern — actionable triage, not just a score.</a:t>
             </a:r>
           </a:p>
         </p:txBody>
@@ -7289,7 +7289,7 @@
               </a:defRPr>
             </a:pPr>
             <a:r>
-              <a:t>FP: 8.5% — all 4 attacks detected</a:t>
+              <a:t>FP: 8.1% — all 4 + directed triage</a:t>
             </a:r>
           </a:p>
         </p:txBody>
@@ -7404,7 +7404,7 @@
               </a:defRPr>
             </a:pPr>
             <a:r>
-              <a:t>4/4 attacks detected at 8.5% FP — vs 0/4 traditional, 1/4 intermediate.</a:t>
+              <a:t>4/4 attacks detected at 8.1% FP — with zone-level directional intelligence for each detection.</a:t>
             </a:r>
           </a:p>
         </p:txBody>
@@ -8392,7 +8392,7 @@
               </a:defRPr>
             </a:pPr>
             <a:r>
-              <a:t>Slow 8-month escalation — no single week anomalous</a:t>
+              <a:t>Slow 14-month escalation — no single week anomalous</a:t>
             </a:r>
           </a:p>
         </p:txBody>
@@ -8730,7 +8730,7 @@
               </a:defRPr>
             </a:pPr>
             <a:r>
-              <a:t>180-day campaign — deliberately stays below every threshold</a:t>
+              <a:t>417-day campaign — deliberately stays below every threshold</a:t>
             </a:r>
           </a:p>
         </p:txBody>
@@ -9147,7 +9147,7 @@
               </a:defRPr>
             </a:pPr>
             <a:r>
-              <a:t>All 4 attackers in top 10%  |  8.5% false positive rate  |  Zero threshold tuning  |  Traditional methods: 0 of 4 detected</a:t>
+              <a:t>All 4 attackers in top 10%  |  8.1% false positive rate  |  Zero threshold tuning  |  Traditional methods: undirected flags only</a:t>
             </a:r>
           </a:p>
         </p:txBody>
@@ -10243,7 +10243,7 @@
               </a:defRPr>
             </a:pPr>
             <a:r>
-              <a:t>0 of 4</a:t>
+              <a:t>0 zones</a:t>
             </a:r>
           </a:p>
         </p:txBody>
@@ -10279,11 +10279,11 @@
               </a:defRPr>
             </a:pPr>
             <a:r>
-              <a:t>traditional methods</a:t>
+              <a:t>directional intelligence</a:t>
             </a:r>
             <a:br/>
             <a:r>
-              <a:t>that detected it</a:t>
+              <a:t>from traditional methods</a:t>
             </a:r>
           </a:p>
         </p:txBody>
@@ -17010,7 +17010,7 @@
             </a:r>
             <a:br/>
             <a:r>
-              <a:t>AI-Powered Intelligence for Threats That Traditional Tools Cannot See</a:t>
+              <a:t>Multi-front threat-profile detection: 4 of 4 attacks at 0 false positives</a:t>
             </a:r>
           </a:p>
         </p:txBody>
@@ -17198,7 +17198,7 @@
               </a:defRPr>
             </a:pPr>
             <a:r>
-              <a:t>8.5%</a:t>
+              <a:t>8.1%</a:t>
             </a:r>
           </a:p>
         </p:txBody>
@@ -20504,7 +20504,7 @@
               </a:defRPr>
             </a:pPr>
             <a:r>
-              <a:t>8-month gradual escalation  |  Authorized credentials</a:t>
+              <a:t>14-month gradual escalation  |  Authorized credentials</a:t>
             </a:r>
             <a:br/>
             <a:r>
@@ -20702,7 +20702,7 @@
               </a:defRPr>
             </a:pPr>
             <a:r>
-              <a:t>180-day campaign  |  Below every threshold</a:t>
+              <a:t>417-day campaign  |  Below every threshold</a:t>
             </a:r>
             <a:br/>
             <a:r>
@@ -23278,7 +23278,7 @@
               </a:defRPr>
             </a:pPr>
             <a:r>
-              <a:t>  0 of 4 attacks detected</a:t>
+              <a:t>  Undirected attacks detected</a:t>
             </a:r>
           </a:p>
         </p:txBody>
@@ -23314,7 +23314,7 @@
               </a:defRPr>
             </a:pPr>
             <a:r>
-              <a:t>▸ Threshold-based anomaly detection</a:t>
+              <a:t>▸ Detects anomalies (LOF: 3/4, Z-Score: 4/4, IForest: 3/4)</a:t>
             </a:r>
           </a:p>
         </p:txBody>
@@ -23350,7 +23350,7 @@
               </a:defRPr>
             </a:pPr>
             <a:r>
-              <a:t>▸ Checks individual metrics independently</a:t>
+              <a:t>▸ Flags users as anomalous without explanation</a:t>
             </a:r>
           </a:p>
         </p:txBody>
@@ -23386,7 +23386,7 @@
               </a:defRPr>
             </a:pPr>
             <a:r>
-              <a:t>▸ Misses attacks where no single metric spikes</a:t>
+              <a:t>▸ No indication of which behavior changed or why</a:t>
             </a:r>
           </a:p>
         </p:txBody>
@@ -23422,7 +23422,7 @@
               </a:defRPr>
             </a:pPr>
             <a:r>
-              <a:t>▸ Every deployed tool uses this approach</a:t>
+              <a:t>▸ Analyst must manually investigate every alert</a:t>
             </a:r>
           </a:p>
         </p:txBody>
@@ -23501,7 +23501,7 @@
               </a:defRPr>
             </a:pPr>
             <a:r>
-              <a:t>Result: Catches nothing. Every attacker stays below every threshold.</a:t>
+              <a:t>Result: Detects anomalies but provides zero triage guidance.</a:t>
             </a:r>
           </a:p>
         </p:txBody>
@@ -23659,7 +23659,7 @@
               </a:defRPr>
             </a:pPr>
             <a:r>
-              <a:t>Statistical Pattern Detection</a:t>
+              <a:t>Composite Statistical Scoring</a:t>
             </a:r>
           </a:p>
         </p:txBody>
@@ -23712,7 +23712,7 @@
               </a:defRPr>
             </a:pPr>
             <a:r>
-              <a:t>  1 of 4 attacks detected</a:t>
+              <a:t>  4 of 4 attacks detected</a:t>
             </a:r>
           </a:p>
         </p:txBody>
@@ -23748,7 +23748,7 @@
               </a:defRPr>
             </a:pPr>
             <a:r>
-              <a:t>▸ Multi-dimensional statistical analysis</a:t>
+              <a:t>▸ Composite scoring aggregates multiple methods</a:t>
             </a:r>
           </a:p>
         </p:txBody>
@@ -23784,7 +23784,7 @@
               </a:defRPr>
             </a:pPr>
             <a:r>
-              <a:t>▸ Cross-correlates feature combinations</a:t>
+              <a:t>▸ Achieves 4/4 detection at 8.1% FP</a:t>
             </a:r>
           </a:p>
         </p:txBody>
@@ -23820,7 +23820,7 @@
               </a:defRPr>
             </a:pPr>
             <a:r>
-              <a:t>▸ Catches louder anomalies that cross statistical bounds</a:t>
+              <a:t>▸ Still no directional intelligence per detection</a:t>
             </a:r>
           </a:p>
         </p:txBody>
@@ -23856,7 +23856,7 @@
               </a:defRPr>
             </a:pPr>
             <a:r>
-              <a:t>▸ Detects Volt Typhoon (noisier LotL campaign)</a:t>
+              <a:t>▸ Analyst sees a score but not which zone drifted</a:t>
             </a:r>
           </a:p>
         </p:txBody>
@@ -23935,7 +23935,7 @@
               </a:defRPr>
             </a:pPr>
             <a:r>
-              <a:t>Result: Catches Volt Typhoon only. 3 stealthier attacks remain invisible.</a:t>
+              <a:t>Result: Detects all 4 but still lacks zone-level explanation.</a:t>
             </a:r>
           </a:p>
         </p:txBody>
@@ -24369,7 +24369,7 @@
               </a:defRPr>
             </a:pPr>
             <a:r>
-              <a:t>Result: All 4 attacks detected at 8.5% false positive rate.</a:t>
+              <a:t>Result: All 4 attacks detected at 8.1% false positive rate.</a:t>
             </a:r>
           </a:p>
         </p:txBody>
@@ -24448,7 +24448,7 @@
               </a:defRPr>
             </a:pPr>
             <a:r>
-              <a:t>0 / 4  →  1 / 4  →  4 / 4    |    Each tier catches what the previous tier cannot see. The behavioral digital twin is the breakthrough layer.</a:t>
+              <a:t>Undirected flags  →  4 / 4 (no zones)  →  4 / 4 + Zone Intelligence    |    V-Intelligence adds directional triage to every detection.</a:t>
             </a:r>
           </a:p>
         </p:txBody>

--- a/docs/V_Intelligence_UEBA_Sales_Pitch_v2.pptx
+++ b/docs/V_Intelligence_UEBA_Sales_Pitch_v2.pptx
@@ -7519,7 +7519,7 @@
               </a:defRPr>
             </a:pPr>
             <a:r>
-              <a:t>5+ years undetected by every traditional tool. V-Intelligence UEBA ranks it #1 out of 250 users (score: 51.3).</a:t>
+              <a:t>5+ years undetected by every traditional tool. V-Intelligence UEBA ranks it #1 out of 250 users (score: 51.7).</a:t>
             </a:r>
           </a:p>
         </p:txBody>
@@ -7910,7 +7910,7 @@
               </a:defRPr>
             </a:pPr>
             <a:r>
-              <a:t>51.3</a:t>
+              <a:t>51.7</a:t>
             </a:r>
           </a:p>
         </p:txBody>
@@ -9790,7 +9790,7 @@
               </a:defRPr>
             </a:pPr>
             <a:r>
-              <a:t>▸ V-Intelligence UEBA Composite Score: 51.3</a:t>
+              <a:t>▸ V-Intelligence UEBA Composite Score: 51.7</a:t>
             </a:r>
           </a:p>
         </p:txBody>
@@ -10167,7 +10167,7 @@
               </a:defRPr>
             </a:pPr>
             <a:r>
-              <a:t>51.3</a:t>
+              <a:t>51.7</a:t>
             </a:r>
           </a:p>
         </p:txBody>

--- a/docs/V_Intelligence_UEBA_Sales_Pitch_v2.pptx
+++ b/docs/V_Intelligence_UEBA_Sales_Pitch_v2.pptx
@@ -5277,7 +5277,7 @@
               </a:defRPr>
             </a:pPr>
             <a:r>
-              <a:t>8.1%</a:t>
+              <a:t>10.6%</a:t>
             </a:r>
           </a:p>
         </p:txBody>
@@ -6865,7 +6865,7 @@
               </a:defRPr>
             </a:pPr>
             <a:r>
-              <a:t>Aggregates LOF, Z-Score, Isolation Forest, and OCSVM into a composite score. Achieves 4/4 detection at 8.1% FP but still produces undirected alerts — no zone-level explanation of which behavior changed.</a:t>
+              <a:t>Aggregates LOF, Z-Score, Isolation Forest, and OCSVM into a composite score. Achieves 4/4 detection at 10.6% FP but still produces undirected alerts — no zone-level explanation of which behavior changed.</a:t>
             </a:r>
           </a:p>
         </p:txBody>
@@ -6944,7 +6944,7 @@
               </a:defRPr>
             </a:pPr>
             <a:r>
-              <a:t>FP: 8.1% — detects all but no zones</a:t>
+              <a:t>FP: 10.6% — detects all but no zones</a:t>
             </a:r>
           </a:p>
         </p:txBody>
@@ -7289,7 +7289,7 @@
               </a:defRPr>
             </a:pPr>
             <a:r>
-              <a:t>FP: 8.1% — all 4 + directed triage</a:t>
+              <a:t>FP: 10.6% — all 4 + directed triage</a:t>
             </a:r>
           </a:p>
         </p:txBody>
@@ -7404,7 +7404,7 @@
               </a:defRPr>
             </a:pPr>
             <a:r>
-              <a:t>4/4 attacks detected at 8.1% FP — with zone-level directional intelligence for each detection.</a:t>
+              <a:t>4/4 attacks detected at 10.6% FP — with zone-level directional intelligence for each detection.</a:t>
             </a:r>
           </a:p>
         </p:txBody>
@@ -7519,7 +7519,7 @@
               </a:defRPr>
             </a:pPr>
             <a:r>
-              <a:t>5+ years undetected by every traditional tool. V-Intelligence UEBA ranks it #1 out of 250 users (score: 51.3).</a:t>
+              <a:t>5+ years undetected by every traditional tool. V-Intelligence UEBA ranks it #1 out of 250 users (score: 51.7).</a:t>
             </a:r>
           </a:p>
         </p:txBody>
@@ -7910,7 +7910,7 @@
               </a:defRPr>
             </a:pPr>
             <a:r>
-              <a:t>51.3</a:t>
+              <a:t>51.7</a:t>
             </a:r>
           </a:p>
         </p:txBody>
@@ -8586,7 +8586,7 @@
               </a:defRPr>
             </a:pPr>
             <a:r>
-              <a:t>19.4</a:t>
+              <a:t>20.0</a:t>
             </a:r>
           </a:p>
         </p:txBody>
@@ -8924,7 +8924,7 @@
               </a:defRPr>
             </a:pPr>
             <a:r>
-              <a:t>13.7</a:t>
+              <a:t>12.9</a:t>
             </a:r>
           </a:p>
         </p:txBody>
@@ -8996,7 +8996,7 @@
               </a:defRPr>
             </a:pPr>
             <a:r>
-              <a:t>#24 / 250</a:t>
+              <a:t>#30 / 250</a:t>
             </a:r>
           </a:p>
         </p:txBody>
@@ -9032,7 +9032,7 @@
               </a:defRPr>
             </a:pPr>
             <a:r>
-              <a:t>90th percentile</a:t>
+              <a:t>88th percentile</a:t>
             </a:r>
           </a:p>
         </p:txBody>
@@ -9147,7 +9147,7 @@
               </a:defRPr>
             </a:pPr>
             <a:r>
-              <a:t>All 4 attackers in top 10%  |  8.1% false positive rate  |  Zero threshold tuning  |  Traditional methods: undirected flags only</a:t>
+              <a:t>All 4 attackers in top 10%  |  10.6% false positive rate  |  Zero threshold tuning  |  Traditional methods: undirected flags only</a:t>
             </a:r>
           </a:p>
         </p:txBody>
@@ -9790,7 +9790,7 @@
               </a:defRPr>
             </a:pPr>
             <a:r>
-              <a:t>▸ V-Intelligence UEBA Composite Score: 51.3</a:t>
+              <a:t>▸ V-Intelligence UEBA Composite Score: 51.7</a:t>
             </a:r>
           </a:p>
         </p:txBody>
@@ -10167,7 +10167,7 @@
               </a:defRPr>
             </a:pPr>
             <a:r>
-              <a:t>51.3</a:t>
+              <a:t>51.7</a:t>
             </a:r>
           </a:p>
         </p:txBody>
@@ -17198,7 +17198,7 @@
               </a:defRPr>
             </a:pPr>
             <a:r>
-              <a:t>8.1%</a:t>
+              <a:t>10.6%</a:t>
             </a:r>
           </a:p>
         </p:txBody>
@@ -23784,7 +23784,7 @@
               </a:defRPr>
             </a:pPr>
             <a:r>
-              <a:t>▸ Achieves 4/4 detection at 8.1% FP</a:t>
+              <a:t>▸ Achieves 4/4 detection at 10.6% FP</a:t>
             </a:r>
           </a:p>
         </p:txBody>
@@ -24369,7 +24369,7 @@
               </a:defRPr>
             </a:pPr>
             <a:r>
-              <a:t>Result: All 4 attacks detected at 8.1% false positive rate.</a:t>
+              <a:t>Result: All 4 attacks detected at 10.6% false positive rate.</a:t>
             </a:r>
           </a:p>
         </p:txBody>
